--- a/classes/parte-0-fundamentos-y-prerrequisitos/016-python-para-seguridad-sockets-y-programacion-de-red/clase-016-presentacion.pptx
+++ b/classes/parte-0-fundamentos-y-prerrequisitos/016-python-para-seguridad-sockets-y-programacion-de-red/clase-016-presentacion.pptx
@@ -17,6 +17,10 @@
     <p:sldId id="265" r:id="rId16"/>
     <p:sldId id="266" r:id="rId17"/>
     <p:sldId id="267" r:id="rId18"/>
+    <p:sldId id="268" r:id="rId19"/>
+    <p:sldId id="269" r:id="rId20"/>
+    <p:sldId id="270" r:id="rId21"/>
+    <p:sldId id="271" r:id="rId22"/>
   </p:sldIdLst>
   <p:sldSz cx="9144000" cy="6858000" type="screen4x3"/>
   <p:notesSz cx="6858000" cy="9144000"/>
@@ -3198,7 +3202,7 @@
                   <a:srgbClr val="0B3D2E"/>
                 </a:solidFill>
               </a:rPr>
-              <a:t>⚠️ Errores comunes</a:t>
+              <a:t>✍️ Ejercicios</a:t>
             </a:r>
           </a:p>
         </p:txBody>
@@ -3236,67 +3240,82 @@
                   <a:srgbClr val="22282E"/>
                 </a:solidFill>
               </a:rPr>
-              <a:t>•  El escáner se cuelga en algunos puertos — Falta settimeout. Fija un timeout corto por socket.</a:t>
-            </a:r>
-          </a:p>
-          <a:p>
-            <a:pPr>
-              <a:spcAft>
-                <a:spcPts val="600"/>
-              </a:spcAft>
-            </a:pPr>
-            <a:r>
-              <a:rPr sz="1500">
-                <a:solidFill>
-                  <a:srgbClr val="22282E"/>
-                </a:solidFill>
-              </a:rPr>
-              <a:t>•  OSError: Too many open files — No cierras los sockets. Usa with o close() y limita hilos.</a:t>
-            </a:r>
-          </a:p>
-          <a:p>
-            <a:pPr>
-              <a:spcAft>
-                <a:spcPts val="600"/>
-              </a:spcAft>
-            </a:pPr>
-            <a:r>
-              <a:rPr sz="1500">
-                <a:solidFill>
-                  <a:srgbClr val="22282E"/>
-                </a:solidFill>
-              </a:rPr>
-              <a:t>•  Todos los puertos parecen "abiertos" o "cerrados" — Confundes connectex (0 = abierto) con excepciones. Revisa el código de retorno.</a:t>
-            </a:r>
-          </a:p>
-          <a:p>
-            <a:pPr>
-              <a:spcAft>
-                <a:spcPts val="600"/>
-              </a:spcAft>
-            </a:pPr>
-            <a:r>
-              <a:rPr sz="1500">
-                <a:solidFill>
-                  <a:srgbClr val="22282E"/>
-                </a:solidFill>
-              </a:rPr>
-              <a:t>•  Banner vacío en puertos abiertos — El servicio espera que hables tú primero (HTTP). Envía una petición antes de recv.</a:t>
-            </a:r>
-          </a:p>
-          <a:p>
-            <a:pPr>
-              <a:spcAft>
-                <a:spcPts val="600"/>
-              </a:spcAft>
-            </a:pPr>
-            <a:r>
-              <a:rPr sz="1500">
-                <a:solidFill>
-                  <a:srgbClr val="22282E"/>
-                </a:solidFill>
-              </a:rPr>
-              <a:t>•  Datos ilegibles al imprimir — Son bytes. Decodifica con errors="replace" o trabaja en hex.</a:t>
+              <a:t>•  Añade a tu escáner la resolución de nombre a IP con socket.gethostbyname y maneja el caso de nombre no resoluble.</a:t>
+            </a:r>
+          </a:p>
+          <a:p>
+            <a:pPr>
+              <a:spcAft>
+                <a:spcPts val="600"/>
+              </a:spcAft>
+            </a:pPr>
+            <a:r>
+              <a:rPr sz="1500">
+                <a:solidFill>
+                  <a:srgbClr val="22282E"/>
+                </a:solidFill>
+              </a:rPr>
+              <a:t>•  Implementa un timeout configurable por argumento de línea de comandos con argparse.</a:t>
+            </a:r>
+          </a:p>
+          <a:p>
+            <a:pPr>
+              <a:spcAft>
+                <a:spcPts val="600"/>
+              </a:spcAft>
+            </a:pPr>
+            <a:r>
+              <a:rPr sz="1500">
+                <a:solidFill>
+                  <a:srgbClr val="22282E"/>
+                </a:solidFill>
+              </a:rPr>
+              <a:t>•  Modifica el banner grabber para enviar HEAD / HTTP/1.0\r\n\r\n y capturar la respuesta de un servidor web, distinguiéndola del comportamiento de SSH.</a:t>
+            </a:r>
+          </a:p>
+          <a:p>
+            <a:pPr>
+              <a:spcAft>
+                <a:spcPts val="600"/>
+              </a:spcAft>
+            </a:pPr>
+            <a:r>
+              <a:rPr sz="1500">
+                <a:solidFill>
+                  <a:srgbClr val="22282E"/>
+                </a:solidFill>
+              </a:rPr>
+              <a:t>•  Escribe un pequeño servidor TCP concurrente que registre cada conexión con su IP y hora en un fichero de log.</a:t>
+            </a:r>
+          </a:p>
+          <a:p>
+            <a:pPr>
+              <a:spcAft>
+                <a:spcPts val="600"/>
+              </a:spcAft>
+            </a:pPr>
+            <a:r>
+              <a:rPr sz="1500">
+                <a:solidFill>
+                  <a:srgbClr val="22282E"/>
+                </a:solidFill>
+              </a:rPr>
+              <a:t>•  Compara y grafica el tiempo de escaneo de 1024 puertos en versión secuencial frente a 100 hilos, y explica dónde deja de ayudar añadir hilos.</a:t>
+            </a:r>
+          </a:p>
+          <a:p>
+            <a:pPr>
+              <a:spcAft>
+                <a:spcPts val="600"/>
+              </a:spcAft>
+            </a:pPr>
+            <a:r>
+              <a:rPr sz="1500">
+                <a:solidFill>
+                  <a:srgbClr val="22282E"/>
+                </a:solidFill>
+              </a:rPr>
+              <a:t>•  Maneja de forma diferenciada ConnectionRefusedError, socket.timeout y OSError, e imprime un estado (cerrado, filtrado, error) según cada uno.</a:t>
             </a:r>
           </a:p>
         </p:txBody>
@@ -3347,7 +3366,7 @@
                   <a:srgbClr val="0B3D2E"/>
                 </a:solidFill>
               </a:rPr>
-              <a:t>❓ Preguntas frecuentes</a:t>
+              <a:t>📝 Reto verificable</a:t>
             </a:r>
           </a:p>
         </p:txBody>
@@ -3385,52 +3404,22 @@
                   <a:srgbClr val="22282E"/>
                 </a:solidFill>
               </a:rPr>
-              <a:t>•  ❓ ¿Por qué mi escáner en Python es más lento que nmap? nmap está en C, usa raw sockets y técnicas avanzadas (SYN scan, temporización adaptativa). El objetivo aquí es entender el mecanismo, no superar a nmap.</a:t>
-            </a:r>
-          </a:p>
-          <a:p>
-            <a:pPr>
-              <a:spcAft>
-                <a:spcPts val="600"/>
-              </a:spcAft>
-            </a:pPr>
-            <a:r>
-              <a:rPr sz="1500">
-                <a:solidFill>
-                  <a:srgbClr val="22282E"/>
-                </a:solidFill>
-              </a:rPr>
-              <a:t>•  ❓ ¿connect scan o SYN scan en Python? Con socket haces connect scan (completa el handshake). Para SYN scan necesitas raw sockets/Scapy, que veremos en la Clase 017.</a:t>
-            </a:r>
-          </a:p>
-          <a:p>
-            <a:pPr>
-              <a:spcAft>
-                <a:spcPts val="600"/>
-              </a:spcAft>
-            </a:pPr>
-            <a:r>
-              <a:rPr sz="1500">
-                <a:solidFill>
-                  <a:srgbClr val="22282E"/>
-                </a:solidFill>
-              </a:rPr>
-              <a:t>•  ❓ ¿Hilos o asyncio? Para I/O de red ambos sirven. Los hilos son más sencillos de entender al principio; asyncio escala mejor a miles de conexiones.</a:t>
-            </a:r>
-          </a:p>
-          <a:p>
-            <a:pPr>
-              <a:spcAft>
-                <a:spcPts val="600"/>
-              </a:spcAft>
-            </a:pPr>
-            <a:r>
-              <a:rPr sz="1500">
-                <a:solidFill>
-                  <a:srgbClr val="22282E"/>
-                </a:solidFill>
-              </a:rPr>
-              <a:t>•  ❓ ¿Puedo escanear UDP con sockets? Sí, pero es poco fiable: la falta de respuesta no distingue "abierto" de "filtrado". Por eso el escaneo UDP es difícil incluso para nmap.</a:t>
+              <a:t>•  Construye pyscan.py, un escáner de puertos TCP multihilo que reciba un objetivo y un rango de puertos por línea de comandos, use timeouts por socket, haga banner grabbing de los puertos abiertos y…</a:t>
+            </a:r>
+          </a:p>
+          <a:p>
+            <a:pPr>
+              <a:spcAft>
+                <a:spcPts val="600"/>
+              </a:spcAft>
+            </a:pPr>
+            <a:r>
+              <a:rPr sz="1500">
+                <a:solidFill>
+                  <a:srgbClr val="22282E"/>
+                </a:solidFill>
+              </a:rPr>
+              <a:t>•  Criterio de aceptación: contra tu VM víctima detecta correctamente los puertos abiertos conocidos y captura al menos un banner (por ejemplo el de SSH), completa el escaneo de 1024 puertos en una…</a:t>
             </a:r>
           </a:p>
         </p:txBody>
@@ -3481,7 +3470,7 @@
                   <a:srgbClr val="0B3D2E"/>
                 </a:solidFill>
               </a:rPr>
-              <a:t>🔗 Referencias</a:t>
+              <a:t>⚠️ Errores comunes</a:t>
             </a:r>
           </a:p>
         </p:txBody>
@@ -3519,37 +3508,335 @@
                   <a:srgbClr val="22282E"/>
                 </a:solidFill>
               </a:rPr>
-              <a:t>•  Seitz &amp; Arnold, Black Hat Python (cap. de redes).</a:t>
-            </a:r>
-          </a:p>
-          <a:p>
-            <a:pPr>
-              <a:spcAft>
-                <a:spcPts val="600"/>
-              </a:spcAft>
-            </a:pPr>
-            <a:r>
-              <a:rPr sz="1500">
-                <a:solidFill>
-                  <a:srgbClr val="22282E"/>
-                </a:solidFill>
-              </a:rPr>
-              <a:t>•  Python socket — &lt;https://docs.python.org/3/library/socket.html&gt;</a:t>
-            </a:r>
-          </a:p>
-          <a:p>
-            <a:pPr>
-              <a:spcAft>
-                <a:spcPts val="600"/>
-              </a:spcAft>
-            </a:pPr>
-            <a:r>
-              <a:rPr sz="1500">
-                <a:solidFill>
-                  <a:srgbClr val="22282E"/>
-                </a:solidFill>
-              </a:rPr>
-              <a:t>•  Python concurrent.futures — &lt;https://docs.python.org/3/library/concurrent.futures.html&gt;</a:t>
+              <a:t>•  El escáner se cuelga en algunos puertos — Falta settimeout. Fija un timeout corto por socket antes de connect.</a:t>
+            </a:r>
+          </a:p>
+          <a:p>
+            <a:pPr>
+              <a:spcAft>
+                <a:spcPts val="600"/>
+              </a:spcAft>
+            </a:pPr>
+            <a:r>
+              <a:rPr sz="1500">
+                <a:solidFill>
+                  <a:srgbClr val="22282E"/>
+                </a:solidFill>
+              </a:rPr>
+              <a:t>•  OSError: Too many open files — No cierras los sockets o abres demasiados a la vez. Usa with/close() y limita el número de hilos.</a:t>
+            </a:r>
+          </a:p>
+          <a:p>
+            <a:pPr>
+              <a:spcAft>
+                <a:spcPts val="600"/>
+              </a:spcAft>
+            </a:pPr>
+            <a:r>
+              <a:rPr sz="1500">
+                <a:solidFill>
+                  <a:srgbClr val="22282E"/>
+                </a:solidFill>
+              </a:rPr>
+              <a:t>•  Todos los puertos parecen "abiertos" o "cerrados" — Confundes connectex (0 = abierto) con la lógica de excepciones. Revisa el código de retorno.</a:t>
+            </a:r>
+          </a:p>
+          <a:p>
+            <a:pPr>
+              <a:spcAft>
+                <a:spcPts val="600"/>
+              </a:spcAft>
+            </a:pPr>
+            <a:r>
+              <a:rPr sz="1500">
+                <a:solidFill>
+                  <a:srgbClr val="22282E"/>
+                </a:solidFill>
+              </a:rPr>
+              <a:t>•  Banner vacío en puertos abiertos — El servicio espera que hables tú primero (HTTP). Envía una petición antes de recv.</a:t>
+            </a:r>
+          </a:p>
+          <a:p>
+            <a:pPr>
+              <a:spcAft>
+                <a:spcPts val="600"/>
+              </a:spcAft>
+            </a:pPr>
+            <a:r>
+              <a:rPr sz="1500">
+                <a:solidFill>
+                  <a:srgbClr val="22282E"/>
+                </a:solidFill>
+              </a:rPr>
+              <a:t>•  Datos ilegibles al imprimir — Recibes bytes, no texto. Decodifica con errors="replace" o trabaja en hexadecimal.</a:t>
+            </a:r>
+          </a:p>
+          <a:p>
+            <a:pPr>
+              <a:spcAft>
+                <a:spcPts val="600"/>
+              </a:spcAft>
+            </a:pPr>
+            <a:r>
+              <a:rPr sz="1500">
+                <a:solidFill>
+                  <a:srgbClr val="22282E"/>
+                </a:solidFill>
+              </a:rPr>
+              <a:t>•  OSError: Address already in use en el servidor — El puerto quedó en TIMEWAIT. Usa setsockopt(SOLSOCKET, SOREUSEADDR, 1) antes de bind.</a:t>
+            </a:r>
+          </a:p>
+        </p:txBody>
+      </p:sp>
+    </p:spTree>
+  </p:cSld>
+  <p:clrMapOvr>
+    <a:masterClrMapping/>
+  </p:clrMapOvr>
+</p:sld>
+</file>
+
+<file path=ppt/slides/slide13.xml><?xml version="1.0" encoding="utf-8"?>
+<p:sld xmlns:a="http://schemas.openxmlformats.org/drawingml/2006/main" xmlns:p="http://schemas.openxmlformats.org/presentationml/2006/main" xmlns:r="http://schemas.openxmlformats.org/officeDocument/2006/relationships">
+  <p:cSld>
+    <p:spTree>
+      <p:nvGrpSpPr>
+        <p:cNvPr id="1" name=""/>
+        <p:cNvGrpSpPr/>
+        <p:nvPr/>
+      </p:nvGrpSpPr>
+      <p:grpSpPr/>
+      <p:sp>
+        <p:nvSpPr>
+          <p:cNvPr id="2" name="TextBox 1"/>
+          <p:cNvSpPr txBox="1"/>
+          <p:nvPr/>
+        </p:nvSpPr>
+        <p:spPr>
+          <a:xfrm>
+            <a:off x="457200" y="320040"/>
+            <a:ext cx="8229600" cy="822960"/>
+          </a:xfrm>
+          <a:prstGeom prst="rect">
+            <a:avLst/>
+          </a:prstGeom>
+          <a:noFill/>
+        </p:spPr>
+        <p:txBody>
+          <a:bodyPr wrap="square">
+            <a:spAutoFit/>
+          </a:bodyPr>
+          <a:lstStyle/>
+          <a:p>
+            <a:r>
+              <a:rPr sz="2600" b="1">
+                <a:solidFill>
+                  <a:srgbClr val="0B3D2E"/>
+                </a:solidFill>
+              </a:rPr>
+              <a:t>❓ Preguntas frecuentes</a:t>
+            </a:r>
+          </a:p>
+        </p:txBody>
+      </p:sp>
+      <p:sp>
+        <p:nvSpPr>
+          <p:cNvPr id="3" name="TextBox 2"/>
+          <p:cNvSpPr txBox="1"/>
+          <p:nvPr/>
+        </p:nvSpPr>
+        <p:spPr>
+          <a:xfrm>
+            <a:off x="457200" y="1280160"/>
+            <a:ext cx="8229600" cy="4937760"/>
+          </a:xfrm>
+          <a:prstGeom prst="rect">
+            <a:avLst/>
+          </a:prstGeom>
+          <a:noFill/>
+        </p:spPr>
+        <p:txBody>
+          <a:bodyPr wrap="square">
+            <a:spAutoFit/>
+          </a:bodyPr>
+          <a:lstStyle/>
+          <a:p>
+            <a:pPr>
+              <a:spcAft>
+                <a:spcPts val="600"/>
+              </a:spcAft>
+            </a:pPr>
+            <a:r>
+              <a:rPr sz="1500">
+                <a:solidFill>
+                  <a:srgbClr val="22282E"/>
+                </a:solidFill>
+              </a:rPr>
+              <a:t>•  ❓ ¿Por qué mi escáner en Python es más lento que nmap? nmap está escrito en C, usa raw sockets y técnicas avanzadas (SYN scan half-open, temporización adaptativa, deduplicación). El objetivo de esta…</a:t>
+            </a:r>
+          </a:p>
+          <a:p>
+            <a:pPr>
+              <a:spcAft>
+                <a:spcPts val="600"/>
+              </a:spcAft>
+            </a:pPr>
+            <a:r>
+              <a:rPr sz="1500">
+                <a:solidFill>
+                  <a:srgbClr val="22282E"/>
+                </a:solidFill>
+              </a:rPr>
+              <a:t>•  ❓ ¿Hago connect scan o SYN scan en Python? Con la librería socket haces connect scan, que completa el handshake y por tanto es más fácil de detectar y registrar. Para un SYN scan half-open necesitas…</a:t>
+            </a:r>
+          </a:p>
+          <a:p>
+            <a:pPr>
+              <a:spcAft>
+                <a:spcPts val="600"/>
+              </a:spcAft>
+            </a:pPr>
+            <a:r>
+              <a:rPr sz="1500">
+                <a:solidFill>
+                  <a:srgbClr val="22282E"/>
+                </a:solidFill>
+              </a:rPr>
+              <a:t>•  ❓ ¿Hilos o asyncio? Para I/O de red ambos sirven. Los hilos son más sencillos de entender al principio y aprovechan que el GIL se libera en las esperas de red; asyncio escala mejor a miles de…</a:t>
+            </a:r>
+          </a:p>
+          <a:p>
+            <a:pPr>
+              <a:spcAft>
+                <a:spcPts val="600"/>
+              </a:spcAft>
+            </a:pPr>
+            <a:r>
+              <a:rPr sz="1500">
+                <a:solidFill>
+                  <a:srgbClr val="22282E"/>
+                </a:solidFill>
+              </a:rPr>
+              <a:t>•  ❓ ¿Puedo escanear UDP con sockets? Sí, pero es poco fiable: la falta de respuesta no distingue "abierto" de "filtrado", porque UDP no acusa recibo. Por eso el escaneo UDP es difícil e incierto…</a:t>
+            </a:r>
+          </a:p>
+        </p:txBody>
+      </p:sp>
+    </p:spTree>
+  </p:cSld>
+  <p:clrMapOvr>
+    <a:masterClrMapping/>
+  </p:clrMapOvr>
+</p:sld>
+</file>
+
+<file path=ppt/slides/slide14.xml><?xml version="1.0" encoding="utf-8"?>
+<p:sld xmlns:a="http://schemas.openxmlformats.org/drawingml/2006/main" xmlns:p="http://schemas.openxmlformats.org/presentationml/2006/main" xmlns:r="http://schemas.openxmlformats.org/officeDocument/2006/relationships">
+  <p:cSld>
+    <p:spTree>
+      <p:nvGrpSpPr>
+        <p:cNvPr id="1" name=""/>
+        <p:cNvGrpSpPr/>
+        <p:nvPr/>
+      </p:nvGrpSpPr>
+      <p:grpSpPr/>
+      <p:sp>
+        <p:nvSpPr>
+          <p:cNvPr id="2" name="TextBox 1"/>
+          <p:cNvSpPr txBox="1"/>
+          <p:nvPr/>
+        </p:nvSpPr>
+        <p:spPr>
+          <a:xfrm>
+            <a:off x="457200" y="320040"/>
+            <a:ext cx="8229600" cy="822960"/>
+          </a:xfrm>
+          <a:prstGeom prst="rect">
+            <a:avLst/>
+          </a:prstGeom>
+          <a:noFill/>
+        </p:spPr>
+        <p:txBody>
+          <a:bodyPr wrap="square">
+            <a:spAutoFit/>
+          </a:bodyPr>
+          <a:lstStyle/>
+          <a:p>
+            <a:r>
+              <a:rPr sz="2600" b="1">
+                <a:solidFill>
+                  <a:srgbClr val="0B3D2E"/>
+                </a:solidFill>
+              </a:rPr>
+              <a:t>🔗 Referencias</a:t>
+            </a:r>
+          </a:p>
+        </p:txBody>
+      </p:sp>
+      <p:sp>
+        <p:nvSpPr>
+          <p:cNvPr id="3" name="TextBox 2"/>
+          <p:cNvSpPr txBox="1"/>
+          <p:nvPr/>
+        </p:nvSpPr>
+        <p:spPr>
+          <a:xfrm>
+            <a:off x="457200" y="1280160"/>
+            <a:ext cx="8229600" cy="4937760"/>
+          </a:xfrm>
+          <a:prstGeom prst="rect">
+            <a:avLst/>
+          </a:prstGeom>
+          <a:noFill/>
+        </p:spPr>
+        <p:txBody>
+          <a:bodyPr wrap="square">
+            <a:spAutoFit/>
+          </a:bodyPr>
+          <a:lstStyle/>
+          <a:p>
+            <a:pPr>
+              <a:spcAft>
+                <a:spcPts val="600"/>
+              </a:spcAft>
+            </a:pPr>
+            <a:r>
+              <a:rPr sz="1500">
+                <a:solidFill>
+                  <a:srgbClr val="22282E"/>
+                </a:solidFill>
+              </a:rPr>
+              <a:t>•  Seitz &amp; Arnold, Black Hat Python (2ª ed.), capítulo de redes.</a:t>
+            </a:r>
+          </a:p>
+          <a:p>
+            <a:pPr>
+              <a:spcAft>
+                <a:spcPts val="600"/>
+              </a:spcAft>
+            </a:pPr>
+            <a:r>
+              <a:rPr sz="1500">
+                <a:solidFill>
+                  <a:srgbClr val="22282E"/>
+                </a:solidFill>
+              </a:rPr>
+              <a:t>•  Python, documentación de socket — &lt;https://docs.python.org/3/library/socket.html&gt;</a:t>
+            </a:r>
+          </a:p>
+          <a:p>
+            <a:pPr>
+              <a:spcAft>
+                <a:spcPts val="600"/>
+              </a:spcAft>
+            </a:pPr>
+            <a:r>
+              <a:rPr sz="1500">
+                <a:solidFill>
+                  <a:srgbClr val="22282E"/>
+                </a:solidFill>
+              </a:rPr>
+              <a:t>•  Python, documentación de concurrent.futures — &lt;https://docs.python.org/3/library/concurrent.futures.html&gt;</a:t>
             </a:r>
           </a:p>
           <a:p>
@@ -3567,8 +3854,173 @@
               <a:t>•  Beej's Guide to Network Programming — &lt;https://beej.us/guide/bgnet/&gt;</a:t>
             </a:r>
           </a:p>
-        </p:txBody>
-      </p:sp>
+          <a:p>
+            <a:pPr>
+              <a:spcAft>
+                <a:spcPts val="600"/>
+              </a:spcAft>
+            </a:pPr>
+            <a:r>
+              <a:rPr sz="1500">
+                <a:solidFill>
+                  <a:srgbClr val="22282E"/>
+                </a:solidFill>
+              </a:rPr>
+              <a:t>•  RFC 9293, Transmission Control Protocol (TCP) — &lt;https://www.rfc-editor.org/rfc/rfc9293&gt;</a:t>
+            </a:r>
+          </a:p>
+        </p:txBody>
+      </p:sp>
+    </p:spTree>
+  </p:cSld>
+  <p:clrMapOvr>
+    <a:masterClrMapping/>
+  </p:clrMapOvr>
+</p:sld>
+</file>
+
+<file path=ppt/slides/slide15.xml><?xml version="1.0" encoding="utf-8"?>
+<p:sld xmlns:a="http://schemas.openxmlformats.org/drawingml/2006/main" xmlns:p="http://schemas.openxmlformats.org/presentationml/2006/main" xmlns:r="http://schemas.openxmlformats.org/officeDocument/2006/relationships">
+  <p:cSld>
+    <p:spTree>
+      <p:nvGrpSpPr>
+        <p:cNvPr id="1" name=""/>
+        <p:cNvGrpSpPr/>
+        <p:nvPr/>
+      </p:nvGrpSpPr>
+      <p:grpSpPr/>
+      <p:sp>
+        <p:nvSpPr>
+          <p:cNvPr id="2" name="TextBox 1"/>
+          <p:cNvSpPr txBox="1"/>
+          <p:nvPr/>
+        </p:nvSpPr>
+        <p:spPr>
+          <a:xfrm>
+            <a:off x="457200" y="274320"/>
+            <a:ext cx="8229600" cy="640080"/>
+          </a:xfrm>
+          <a:prstGeom prst="rect">
+            <a:avLst/>
+          </a:prstGeom>
+          <a:noFill/>
+        </p:spPr>
+        <p:txBody>
+          <a:bodyPr wrap="square">
+            <a:spAutoFit/>
+          </a:bodyPr>
+          <a:lstStyle/>
+          <a:p>
+            <a:r>
+              <a:rPr sz="2200" b="1">
+                <a:solidFill>
+                  <a:srgbClr val="0B3D2E"/>
+                </a:solidFill>
+              </a:rPr>
+              <a:t>Diagrama 1</a:t>
+            </a:r>
+          </a:p>
+        </p:txBody>
+      </p:sp>
+      <p:pic>
+        <p:nvPicPr>
+          <p:cNvPr id="3" name="Picture 2" descr="feecd18f3b96be77.png"/>
+          <p:cNvPicPr>
+            <a:picLocks noChangeAspect="1"/>
+          </p:cNvPicPr>
+          <p:nvPr/>
+        </p:nvPicPr>
+        <p:blipFill>
+          <a:blip r:embed="rId2"/>
+          <a:stretch>
+            <a:fillRect/>
+          </a:stretch>
+        </p:blipFill>
+        <p:spPr>
+          <a:xfrm>
+            <a:off x="2495581" y="1097280"/>
+            <a:ext cx="4152837" cy="5303520"/>
+          </a:xfrm>
+          <a:prstGeom prst="rect">
+            <a:avLst/>
+          </a:prstGeom>
+        </p:spPr>
+      </p:pic>
+    </p:spTree>
+  </p:cSld>
+  <p:clrMapOvr>
+    <a:masterClrMapping/>
+  </p:clrMapOvr>
+</p:sld>
+</file>
+
+<file path=ppt/slides/slide16.xml><?xml version="1.0" encoding="utf-8"?>
+<p:sld xmlns:a="http://schemas.openxmlformats.org/drawingml/2006/main" xmlns:p="http://schemas.openxmlformats.org/presentationml/2006/main" xmlns:r="http://schemas.openxmlformats.org/officeDocument/2006/relationships">
+  <p:cSld>
+    <p:spTree>
+      <p:nvGrpSpPr>
+        <p:cNvPr id="1" name=""/>
+        <p:cNvGrpSpPr/>
+        <p:nvPr/>
+      </p:nvGrpSpPr>
+      <p:grpSpPr/>
+      <p:sp>
+        <p:nvSpPr>
+          <p:cNvPr id="2" name="TextBox 1"/>
+          <p:cNvSpPr txBox="1"/>
+          <p:nvPr/>
+        </p:nvSpPr>
+        <p:spPr>
+          <a:xfrm>
+            <a:off x="457200" y="274320"/>
+            <a:ext cx="8229600" cy="640080"/>
+          </a:xfrm>
+          <a:prstGeom prst="rect">
+            <a:avLst/>
+          </a:prstGeom>
+          <a:noFill/>
+        </p:spPr>
+        <p:txBody>
+          <a:bodyPr wrap="square">
+            <a:spAutoFit/>
+          </a:bodyPr>
+          <a:lstStyle/>
+          <a:p>
+            <a:r>
+              <a:rPr sz="2200" b="1">
+                <a:solidFill>
+                  <a:srgbClr val="0B3D2E"/>
+                </a:solidFill>
+              </a:rPr>
+              <a:t>Diagrama 2</a:t>
+            </a:r>
+          </a:p>
+        </p:txBody>
+      </p:sp>
+      <p:pic>
+        <p:nvPicPr>
+          <p:cNvPr id="3" name="Picture 2" descr="6cfb529320dd1ce1.png"/>
+          <p:cNvPicPr>
+            <a:picLocks noChangeAspect="1"/>
+          </p:cNvPicPr>
+          <p:nvPr/>
+        </p:nvPicPr>
+        <p:blipFill>
+          <a:blip r:embed="rId2"/>
+          <a:stretch>
+            <a:fillRect/>
+          </a:stretch>
+        </p:blipFill>
+        <p:spPr>
+          <a:xfrm>
+            <a:off x="457200" y="2601468"/>
+            <a:ext cx="8229600" cy="2295144"/>
+          </a:xfrm>
+          <a:prstGeom prst="rect">
+            <a:avLst/>
+          </a:prstGeom>
+        </p:spPr>
+      </p:pic>
     </p:spTree>
   </p:cSld>
   <p:clrMapOvr>
@@ -3653,7 +4105,7 @@
                   <a:srgbClr val="22282E"/>
                 </a:solidFill>
               </a:rPr>
-              <a:t>•  Programar comunicaciones de red desde cero con la librería socket. Al terminar podrás construir clientes y servidores TCP/UDP, un escáner de puertos y un cliente/servidor tipo banner grabber, entendiendo cómo se traduce la teoría TCP/IP a código. Es la base de casi cualquier herramienta ofensiva de red.</a:t>
+              <a:t>•  Programar comunicaciones de red desde cero con la librería estándar socket de Python, entendiendo cómo cada línea de código se corresponde con un concepto del stack TCP/IP que ya estudiaste. Al…</a:t>
             </a:r>
           </a:p>
         </p:txBody>
@@ -3757,67 +4209,82 @@
                   <a:srgbClr val="22282E"/>
                 </a:solidFill>
               </a:rPr>
-              <a:t>•  Crear clientes y servidores TCP con socket.</a:t>
-            </a:r>
-          </a:p>
-          <a:p>
-            <a:pPr>
-              <a:spcAft>
-                <a:spcPts val="600"/>
-              </a:spcAft>
-            </a:pPr>
-            <a:r>
-              <a:rPr sz="1500">
-                <a:solidFill>
-                  <a:srgbClr val="22282E"/>
-                </a:solidFill>
-              </a:rPr>
-              <a:t>•  Implementar comunicación UDP.</a:t>
-            </a:r>
-          </a:p>
-          <a:p>
-            <a:pPr>
-              <a:spcAft>
-                <a:spcPts val="600"/>
-              </a:spcAft>
-            </a:pPr>
-            <a:r>
-              <a:rPr sz="1500">
-                <a:solidFill>
-                  <a:srgbClr val="22282E"/>
-                </a:solidFill>
-              </a:rPr>
-              <a:t>•  Escribir un escáner de puertos con manejo de timeouts.</a:t>
-            </a:r>
-          </a:p>
-          <a:p>
-            <a:pPr>
-              <a:spcAft>
-                <a:spcPts val="600"/>
-              </a:spcAft>
-            </a:pPr>
-            <a:r>
-              <a:rPr sz="1500">
-                <a:solidFill>
-                  <a:srgbClr val="22282E"/>
-                </a:solidFill>
-              </a:rPr>
-              <a:t>•  Realizar banner grabbing para identificar servicios.</a:t>
-            </a:r>
-          </a:p>
-          <a:p>
-            <a:pPr>
-              <a:spcAft>
-                <a:spcPts val="600"/>
-              </a:spcAft>
-            </a:pPr>
-            <a:r>
-              <a:rPr sz="1500">
-                <a:solidFill>
-                  <a:srgbClr val="22282E"/>
-                </a:solidFill>
-              </a:rPr>
-              <a:t>•  Aplicar concurrencia (hilos) para acelerar tareas de red.</a:t>
+              <a:t>•  Explicar cómo la API de sockets traduce el modelo TCP/IP a llamadas concretas del sistema operativo.</a:t>
+            </a:r>
+          </a:p>
+          <a:p>
+            <a:pPr>
+              <a:spcAft>
+                <a:spcPts val="600"/>
+              </a:spcAft>
+            </a:pPr>
+            <a:r>
+              <a:rPr sz="1500">
+                <a:solidFill>
+                  <a:srgbClr val="22282E"/>
+                </a:solidFill>
+              </a:rPr>
+              <a:t>•  Crear clientes y servidores TCP con socket, controlando el ciclo bind/listen/accept.</a:t>
+            </a:r>
+          </a:p>
+          <a:p>
+            <a:pPr>
+              <a:spcAft>
+                <a:spcPts val="600"/>
+              </a:spcAft>
+            </a:pPr>
+            <a:r>
+              <a:rPr sz="1500">
+                <a:solidFill>
+                  <a:srgbClr val="22282E"/>
+                </a:solidFill>
+              </a:rPr>
+              <a:t>•  Implementar comunicación UDP sin conexión y razonar sus límites de fiabilidad.</a:t>
+            </a:r>
+          </a:p>
+          <a:p>
+            <a:pPr>
+              <a:spcAft>
+                <a:spcPts val="600"/>
+              </a:spcAft>
+            </a:pPr>
+            <a:r>
+              <a:rPr sz="1500">
+                <a:solidFill>
+                  <a:srgbClr val="22282E"/>
+                </a:solidFill>
+              </a:rPr>
+              <a:t>•  Construir un escáner de puertos con connectex() y timeouts que no se cuelgue ante puertos filtrados.</a:t>
+            </a:r>
+          </a:p>
+          <a:p>
+            <a:pPr>
+              <a:spcAft>
+                <a:spcPts val="600"/>
+              </a:spcAft>
+            </a:pPr>
+            <a:r>
+              <a:rPr sz="1500">
+                <a:solidFill>
+                  <a:srgbClr val="22282E"/>
+                </a:solidFill>
+              </a:rPr>
+              <a:t>•  Realizar banner grabbing para inferir el servicio y su versión.</a:t>
+            </a:r>
+          </a:p>
+          <a:p>
+            <a:pPr>
+              <a:spcAft>
+                <a:spcPts val="600"/>
+              </a:spcAft>
+            </a:pPr>
+            <a:r>
+              <a:rPr sz="1500">
+                <a:solidFill>
+                  <a:srgbClr val="22282E"/>
+                </a:solidFill>
+              </a:rPr>
+              <a:t>•  Aplicar concurrencia con hilos para acelerar tareas de red I/O-bound de forma medible.</a:t>
             </a:r>
           </a:p>
         </p:txBody>
@@ -3966,7 +4433,7 @@
                   <a:srgbClr val="22282E"/>
                 </a:solidFill>
               </a:rPr>
-              <a:t>•  5 — Timeouts</a:t>
+              <a:t>•  5 — Timeouts y errores</a:t>
             </a:r>
           </a:p>
           <a:p>
@@ -4047,7 +4514,7 @@
                   <a:srgbClr val="0B3D2E"/>
                 </a:solidFill>
               </a:rPr>
-              <a:t>📖 Definiciones y características</a:t>
+              <a:t>🧠 Explicación en profundidad</a:t>
             </a:r>
           </a:p>
         </p:txBody>
@@ -4085,82 +4552,97 @@
                   <a:srgbClr val="22282E"/>
                 </a:solidFill>
               </a:rPr>
-              <a:t>•  Socket: extremo de comunicación identificado por IP+puerto. Clave: AFINET (IPv4) + SOCKSTREAM (TCP) o SOCKDGRAM (UDP).</a:t>
-            </a:r>
-          </a:p>
-          <a:p>
-            <a:pPr>
-              <a:spcAft>
-                <a:spcPts val="600"/>
-              </a:spcAft>
-            </a:pPr>
-            <a:r>
-              <a:rPr sz="1500">
-                <a:solidFill>
-                  <a:srgbClr val="22282E"/>
-                </a:solidFill>
-              </a:rPr>
-              <a:t>•  connect(): inicia el handshake TCP hacia un destino. Clave: un connect exitoso implica puerto abierto (base del connect scan).</a:t>
-            </a:r>
-          </a:p>
-          <a:p>
-            <a:pPr>
-              <a:spcAft>
-                <a:spcPts val="600"/>
-              </a:spcAft>
-            </a:pPr>
-            <a:r>
-              <a:rPr sz="1500">
-                <a:solidFill>
-                  <a:srgbClr val="22282E"/>
-                </a:solidFill>
-              </a:rPr>
-              <a:t>•  Timeout: tiempo máximo de espera de una operación. Clave: sin él, un puerto filtrado cuelga el escáner.</a:t>
-            </a:r>
-          </a:p>
-          <a:p>
-            <a:pPr>
-              <a:spcAft>
-                <a:spcPts val="600"/>
-              </a:spcAft>
-            </a:pPr>
-            <a:r>
-              <a:rPr sz="1500">
-                <a:solidFill>
-                  <a:srgbClr val="22282E"/>
-                </a:solidFill>
-              </a:rPr>
-              <a:t>•  Banner: texto que muchos servicios envían al conectar (versión, software). Clave: revela información para fingerprinting.</a:t>
-            </a:r>
-          </a:p>
-          <a:p>
-            <a:pPr>
-              <a:spcAft>
-                <a:spcPts val="600"/>
-              </a:spcAft>
-            </a:pPr>
-            <a:r>
-              <a:rPr sz="1500">
-                <a:solidFill>
-                  <a:srgbClr val="22282E"/>
-                </a:solidFill>
-              </a:rPr>
-              <a:t>•  Hilo (thread): flujo de ejecución concurrente. Clave: la red es I/O-bound, así que los hilos aceleran mucho el escaneo.</a:t>
-            </a:r>
-          </a:p>
-          <a:p>
-            <a:pPr>
-              <a:spcAft>
-                <a:spcPts val="600"/>
-              </a:spcAft>
-            </a:pPr>
-            <a:r>
-              <a:rPr sz="1500">
-                <a:solidFill>
-                  <a:srgbClr val="22282E"/>
-                </a:solidFill>
-              </a:rPr>
-              <a:t>•  bind()/listen(): preparan un servidor para aceptar conexiones. Clave: base de un handler/listener.</a:t>
+              <a:t>•  Un socket no es una entidad de red que viaje por el cable: es una estructura de datos que el núcleo del sistema operativo te entrega como un descriptor de fichero, y que representa un extremo de una…</a:t>
+            </a:r>
+          </a:p>
+          <a:p>
+            <a:pPr>
+              <a:spcAft>
+                <a:spcPts val="600"/>
+              </a:spcAft>
+            </a:pPr>
+            <a:r>
+              <a:rPr sz="1500">
+                <a:solidFill>
+                  <a:srgbClr val="22282E"/>
+                </a:solidFill>
+              </a:rPr>
+              <a:t>•  El lado cliente es la coreografía corta: creas el socket, opcionalmente le fijas un timeout con settimeout(), y llamas a connect((ip, puerto)). Ese connect desencadena el handshake TCP; si vuelve sin…</a:t>
+            </a:r>
+          </a:p>
+          <a:p>
+            <a:pPr>
+              <a:spcAft>
+                <a:spcPts val="600"/>
+              </a:spcAft>
+            </a:pPr>
+            <a:r>
+              <a:rPr sz="1500">
+                <a:solidFill>
+                  <a:srgbClr val="22282E"/>
+                </a:solidFill>
+              </a:rPr>
+              <a:t>•  La diferencia entre SOCKSTREAM y SOCKDGRAM no es de sintaxis sino de contrato. TCP te vende un flujo de bytes fiable y ordenado: garantiza entrega, orden y control de congestión, a cambio de…</a:t>
+            </a:r>
+          </a:p>
+          <a:p>
+            <a:pPr>
+              <a:spcAft>
+                <a:spcPts val="600"/>
+              </a:spcAft>
+            </a:pPr>
+            <a:r>
+              <a:rPr sz="1500">
+                <a:solidFill>
+                  <a:srgbClr val="22282E"/>
+                </a:solidFill>
+              </a:rPr>
+              <a:t>•  Característica — TCP (SOCKSTREAM)</a:t>
+            </a:r>
+          </a:p>
+          <a:p>
+            <a:pPr>
+              <a:spcAft>
+                <a:spcPts val="600"/>
+              </a:spcAft>
+            </a:pPr>
+            <a:r>
+              <a:rPr sz="1500">
+                <a:solidFill>
+                  <a:srgbClr val="22282E"/>
+                </a:solidFill>
+              </a:rPr>
+              <a:t>•  Conexión previa — Sí (three-way handshake)</a:t>
+            </a:r>
+          </a:p>
+          <a:p>
+            <a:pPr>
+              <a:spcAft>
+                <a:spcPts val="600"/>
+              </a:spcAft>
+            </a:pPr>
+            <a:r>
+              <a:rPr sz="1500">
+                <a:solidFill>
+                  <a:srgbClr val="22282E"/>
+                </a:solidFill>
+              </a:rPr>
+              <a:t>•  Fiabilidad — Entrega y orden garantizados</a:t>
+            </a:r>
+          </a:p>
+          <a:p>
+            <a:pPr>
+              <a:spcAft>
+                <a:spcPts val="600"/>
+              </a:spcAft>
+            </a:pPr>
+            <a:r>
+              <a:rPr sz="1500">
+                <a:solidFill>
+                  <a:srgbClr val="22282E"/>
+                </a:solidFill>
+              </a:rPr>
+              <a:t>•  Detección de estado en escaneo — Fiable (RST vs. SYN-ACK)</a:t>
             </a:r>
           </a:p>
         </p:txBody>
@@ -4211,7 +4693,7 @@
                   <a:srgbClr val="0B3D2E"/>
                 </a:solidFill>
               </a:rPr>
-              <a:t>🧰 Herramientas y preparación</a:t>
+              <a:t>📖 Definiciones y características</a:t>
             </a:r>
           </a:p>
         </p:txBody>
@@ -4249,7 +4731,97 @@
                   <a:srgbClr val="22282E"/>
                 </a:solidFill>
               </a:rPr>
-              <a:t>•  Solo necesitas Python 3 y la stdlib (socket, threading, concurrent.futures). Trabaja en tu laboratorio aislado con Kali y una VM víctima. Ten nc (netcat) a mano para levantar servicios de prueba y comparar comportamientos.</a:t>
+              <a:t>•  Socket: extremo de comunicación identificado por la tupla IP + puerto, entregado por el kernel como descriptor de fichero. La clave es la pareja AFINET (IPv4) con SOCKSTREAM (TCP) o SOCKDGRAM (UDP)…</a:t>
+            </a:r>
+          </a:p>
+          <a:p>
+            <a:pPr>
+              <a:spcAft>
+                <a:spcPts val="600"/>
+              </a:spcAft>
+            </a:pPr>
+            <a:r>
+              <a:rPr sz="1500">
+                <a:solidFill>
+                  <a:srgbClr val="22282E"/>
+                </a:solidFill>
+              </a:rPr>
+              <a:t>•  connect(): inicia el three-way handshake TCP hacia un destino. Un connect exitoso implica que el puerto está abierto y acepta conexiones; es la base teórica del connect scan, el más fiable pero…</a:t>
+            </a:r>
+          </a:p>
+          <a:p>
+            <a:pPr>
+              <a:spcAft>
+                <a:spcPts val="600"/>
+              </a:spcAft>
+            </a:pPr>
+            <a:r>
+              <a:rPr sz="1500">
+                <a:solidFill>
+                  <a:srgbClr val="22282E"/>
+                </a:solidFill>
+              </a:rPr>
+              <a:t>•  connectex(): variante de connect que devuelve el código de error del sistema en lugar de lanzar una excepción. Devuelve 0 cuando el puerto está abierto, lo que hace el código de un escáner más limpio…</a:t>
+            </a:r>
+          </a:p>
+          <a:p>
+            <a:pPr>
+              <a:spcAft>
+                <a:spcPts val="600"/>
+              </a:spcAft>
+            </a:pPr>
+            <a:r>
+              <a:rPr sz="1500">
+                <a:solidFill>
+                  <a:srgbClr val="22282E"/>
+                </a:solidFill>
+              </a:rPr>
+              <a:t>•  bind() / listen() / accept(): la tríada del lado servidor. bind fija la dirección local, listen pone el socket en modo escucha con un backlog, y accept bloquea hasta que llega un cliente y devuelve…</a:t>
+            </a:r>
+          </a:p>
+          <a:p>
+            <a:pPr>
+              <a:spcAft>
+                <a:spcPts val="600"/>
+              </a:spcAft>
+            </a:pPr>
+            <a:r>
+              <a:rPr sz="1500">
+                <a:solidFill>
+                  <a:srgbClr val="22282E"/>
+                </a:solidFill>
+              </a:rPr>
+              <a:t>•  Timeout: tiempo máximo que una operación de socket espera antes de rendirse. Sin él, un puerto filtrado cuelga el escáner indefinidamente; con él, distingues respuestas rápidas de silencios. Se fija…</a:t>
+            </a:r>
+          </a:p>
+          <a:p>
+            <a:pPr>
+              <a:spcAft>
+                <a:spcPts val="600"/>
+              </a:spcAft>
+            </a:pPr>
+            <a:r>
+              <a:rPr sz="1500">
+                <a:solidFill>
+                  <a:srgbClr val="22282E"/>
+                </a:solidFill>
+              </a:rPr>
+              <a:t>•  Banner: texto que muchos servicios envían nada más aceptar la conexión (versión, software, mensaje de bienvenida). Revela información valiosa para el fingerprinting y para cruzar con bases de…</a:t>
+            </a:r>
+          </a:p>
+          <a:p>
+            <a:pPr>
+              <a:spcAft>
+                <a:spcPts val="600"/>
+              </a:spcAft>
+            </a:pPr>
+            <a:r>
+              <a:rPr sz="1500">
+                <a:solidFill>
+                  <a:srgbClr val="22282E"/>
+                </a:solidFill>
+              </a:rPr>
+              <a:t>•  Banner grabbing: técnica de conectar a un puerto abierto y leer ese banner para identificar el servicio. Algunos servicios (como HTTP) esperan que hables tú primero, así que a veces hay que enviar…</a:t>
             </a:r>
           </a:p>
         </p:txBody>
@@ -4300,7 +4872,7 @@
                   <a:srgbClr val="0B3D2E"/>
                 </a:solidFill>
               </a:rPr>
-              <a:t>🧪 Laboratorio guiado</a:t>
+              <a:t>📔 Glosario</a:t>
             </a:r>
           </a:p>
         </p:txBody>
@@ -4338,97 +4910,97 @@
                   <a:srgbClr val="22282E"/>
                 </a:solidFill>
               </a:rPr>
-              <a:t>•  Cliente TCP mínimo. Conéctate a un servicio de la víctima y lee su banner:</a:t>
-            </a:r>
-          </a:p>
-          <a:p>
-            <a:pPr>
-              <a:spcAft>
-                <a:spcPts val="600"/>
-              </a:spcAft>
-            </a:pPr>
-            <a:r>
-              <a:rPr sz="1500">
-                <a:solidFill>
-                  <a:srgbClr val="22282E"/>
-                </a:solidFill>
-              </a:rPr>
-              <a:t>•  import socket</a:t>
-            </a:r>
-          </a:p>
-          <a:p>
-            <a:pPr>
-              <a:spcAft>
-                <a:spcPts val="600"/>
-              </a:spcAft>
-            </a:pPr>
-            <a:r>
-              <a:rPr sz="1500">
-                <a:solidFill>
-                  <a:srgbClr val="22282E"/>
-                </a:solidFill>
-              </a:rPr>
-              <a:t>•  s = socket.socket(socket.AFINET, socket.SOCKSTREAM)</a:t>
-            </a:r>
-          </a:p>
-          <a:p>
-            <a:pPr>
-              <a:spcAft>
-                <a:spcPts val="600"/>
-              </a:spcAft>
-            </a:pPr>
-            <a:r>
-              <a:rPr sz="1500">
-                <a:solidFill>
-                  <a:srgbClr val="22282E"/>
-                </a:solidFill>
-              </a:rPr>
-              <a:t>•  s.settimeout(3)</a:t>
-            </a:r>
-          </a:p>
-          <a:p>
-            <a:pPr>
-              <a:spcAft>
-                <a:spcPts val="600"/>
-              </a:spcAft>
-            </a:pPr>
-            <a:r>
-              <a:rPr sz="1500">
-                <a:solidFill>
-                  <a:srgbClr val="22282E"/>
-                </a:solidFill>
-              </a:rPr>
-              <a:t>•  s.connect(("10.10.10.6", 22))</a:t>
-            </a:r>
-          </a:p>
-          <a:p>
-            <a:pPr>
-              <a:spcAft>
-                <a:spcPts val="600"/>
-              </a:spcAft>
-            </a:pPr>
-            <a:r>
-              <a:rPr sz="1500">
-                <a:solidFill>
-                  <a:srgbClr val="22282E"/>
-                </a:solidFill>
-              </a:rPr>
-              <a:t>•  print(s.recv(1024).decode(errors="replace"))</a:t>
-            </a:r>
-          </a:p>
-          <a:p>
-            <a:pPr>
-              <a:spcAft>
-                <a:spcPts val="600"/>
-              </a:spcAft>
-            </a:pPr>
-            <a:r>
-              <a:rPr sz="1500">
-                <a:solidFill>
-                  <a:srgbClr val="22282E"/>
-                </a:solidFill>
-              </a:rPr>
-              <a:t>•  s.close()</a:t>
+              <a:t>•  Término — Definición concisa</a:t>
+            </a:r>
+          </a:p>
+          <a:p>
+            <a:pPr>
+              <a:spcAft>
+                <a:spcPts val="600"/>
+              </a:spcAft>
+            </a:pPr>
+            <a:r>
+              <a:rPr sz="1500">
+                <a:solidFill>
+                  <a:srgbClr val="22282E"/>
+                </a:solidFill>
+              </a:rPr>
+              <a:t>•  Socket — Extremo de comunicación (IP + puerto) gestionado por el kernel</a:t>
+            </a:r>
+          </a:p>
+          <a:p>
+            <a:pPr>
+              <a:spcAft>
+                <a:spcPts val="600"/>
+              </a:spcAft>
+            </a:pPr>
+            <a:r>
+              <a:rPr sz="1500">
+                <a:solidFill>
+                  <a:srgbClr val="22282E"/>
+                </a:solidFill>
+              </a:rPr>
+              <a:t>•  AFINET — Familia de direcciones IPv4</a:t>
+            </a:r>
+          </a:p>
+          <a:p>
+            <a:pPr>
+              <a:spcAft>
+                <a:spcPts val="600"/>
+              </a:spcAft>
+            </a:pPr>
+            <a:r>
+              <a:rPr sz="1500">
+                <a:solidFill>
+                  <a:srgbClr val="22282E"/>
+                </a:solidFill>
+              </a:rPr>
+              <a:t>•  SOCKSTREAM — Tipo de socket orientado a flujo fiable (TCP)</a:t>
+            </a:r>
+          </a:p>
+          <a:p>
+            <a:pPr>
+              <a:spcAft>
+                <a:spcPts val="600"/>
+              </a:spcAft>
+            </a:pPr>
+            <a:r>
+              <a:rPr sz="1500">
+                <a:solidFill>
+                  <a:srgbClr val="22282E"/>
+                </a:solidFill>
+              </a:rPr>
+              <a:t>•  SOCKDGRAM — Tipo de socket de datagramas sin conexión (UDP)</a:t>
+            </a:r>
+          </a:p>
+          <a:p>
+            <a:pPr>
+              <a:spcAft>
+                <a:spcPts val="600"/>
+              </a:spcAft>
+            </a:pPr>
+            <a:r>
+              <a:rPr sz="1500">
+                <a:solidFill>
+                  <a:srgbClr val="22282E"/>
+                </a:solidFill>
+              </a:rPr>
+              <a:t>•  Handshake — Intercambio SYN, SYN-ACK, ACK que abre una conexión TCP</a:t>
+            </a:r>
+          </a:p>
+          <a:p>
+            <a:pPr>
+              <a:spcAft>
+                <a:spcPts val="600"/>
+              </a:spcAft>
+            </a:pPr>
+            <a:r>
+              <a:rPr sz="1500">
+                <a:solidFill>
+                  <a:srgbClr val="22282E"/>
+                </a:solidFill>
+              </a:rPr>
+              <a:t>•  Backlog — Cola de conexiones pendientes que fija listen()</a:t>
             </a:r>
           </a:p>
         </p:txBody>
@@ -4479,7 +5051,7 @@
                   <a:srgbClr val="0B3D2E"/>
                 </a:solidFill>
               </a:rPr>
-              <a:t>✍️ Ejercicios</a:t>
+              <a:t>🧰 Herramientas y preparación</a:t>
             </a:r>
           </a:p>
         </p:txBody>
@@ -4517,82 +5089,7 @@
                   <a:srgbClr val="22282E"/>
                 </a:solidFill>
               </a:rPr>
-              <a:t>•  Añade a tu escáner la resolución de nombre a IP con socket.gethostbyname.</a:t>
-            </a:r>
-          </a:p>
-          <a:p>
-            <a:pPr>
-              <a:spcAft>
-                <a:spcPts val="600"/>
-              </a:spcAft>
-            </a:pPr>
-            <a:r>
-              <a:rPr sz="1500">
-                <a:solidFill>
-                  <a:srgbClr val="22282E"/>
-                </a:solidFill>
-              </a:rPr>
-              <a:t>•  Implementa un timeout configurable por argumento de línea de comandos.</a:t>
-            </a:r>
-          </a:p>
-          <a:p>
-            <a:pPr>
-              <a:spcAft>
-                <a:spcPts val="600"/>
-              </a:spcAft>
-            </a:pPr>
-            <a:r>
-              <a:rPr sz="1500">
-                <a:solidFill>
-                  <a:srgbClr val="22282E"/>
-                </a:solidFill>
-              </a:rPr>
-              <a:t>•  Modifica el banner grabber para enviar HEAD / HTTP/1.0\r\n\r\n y capturar la respuesta de un servidor web.</a:t>
-            </a:r>
-          </a:p>
-          <a:p>
-            <a:pPr>
-              <a:spcAft>
-                <a:spcPts val="600"/>
-              </a:spcAft>
-            </a:pPr>
-            <a:r>
-              <a:rPr sz="1500">
-                <a:solidFill>
-                  <a:srgbClr val="22282E"/>
-                </a:solidFill>
-              </a:rPr>
-              <a:t>•  Escribe un pequeño servidor TCP que registre cada conexión con su IP y hora.</a:t>
-            </a:r>
-          </a:p>
-          <a:p>
-            <a:pPr>
-              <a:spcAft>
-                <a:spcPts val="600"/>
-              </a:spcAft>
-            </a:pPr>
-            <a:r>
-              <a:rPr sz="1500">
-                <a:solidFill>
-                  <a:srgbClr val="22282E"/>
-                </a:solidFill>
-              </a:rPr>
-              <a:t>•  Compara el tiempo de escaneo de 1024 puertos en versión secuencial vs. con 100 hilos.</a:t>
-            </a:r>
-          </a:p>
-          <a:p>
-            <a:pPr>
-              <a:spcAft>
-                <a:spcPts val="600"/>
-              </a:spcAft>
-            </a:pPr>
-            <a:r>
-              <a:rPr sz="1500">
-                <a:solidFill>
-                  <a:srgbClr val="22282E"/>
-                </a:solidFill>
-              </a:rPr>
-              <a:t>•  Maneja correctamente ConnectionRefusedError, socket.timeout y OSError.</a:t>
+              <a:t>•  Solo necesitas Python 3 y su librería estándar (socket, threading, concurrent.futures); no hace falta instalar nada. Trabaja siempre en tu laboratorio aislado, con una máquina Kali como atacante y…</a:t>
             </a:r>
           </a:p>
         </p:txBody>
@@ -4643,7 +5140,7 @@
                   <a:srgbClr val="0B3D2E"/>
                 </a:solidFill>
               </a:rPr>
-              <a:t>📝 Reto verificable</a:t>
+              <a:t>🧪 Laboratorio guiado</a:t>
             </a:r>
           </a:p>
         </p:txBody>
@@ -4681,22 +5178,97 @@
                   <a:srgbClr val="22282E"/>
                 </a:solidFill>
               </a:rPr>
-              <a:t>•  Construye pyscan.py, un escáner de puertos TCP multihilo que reciba un objetivo y un rango de puertos, use timeouts, haga banner grabbing de los puertos abiertos y muestre un informe ordenado (puerto → estado → banner). Debe manejar errores de red y ser notablemente más rápido que la versión secuencial.</a:t>
-            </a:r>
-          </a:p>
-          <a:p>
-            <a:pPr>
-              <a:spcAft>
-                <a:spcPts val="600"/>
-              </a:spcAft>
-            </a:pPr>
-            <a:r>
-              <a:rPr sz="1500">
-                <a:solidFill>
-                  <a:srgbClr val="22282E"/>
-                </a:solidFill>
-              </a:rPr>
-              <a:t>•  Criterio de aceptación: contra tu VM víctima detecta correctamente los puertos abiertos conocidos y captura al menos un banner (p. ej. SSH), completa el escaneo de 1024 puertos en una fracción del tiempo de la versión secuencial, y no se cuelga ante puertos filtrados. Comparable con la salida de nmap.</a:t>
+              <a:t>•  Cliente TCP mínimo. Conéctate a un servicio de la víctima y lee su banner:</a:t>
+            </a:r>
+          </a:p>
+          <a:p>
+            <a:pPr>
+              <a:spcAft>
+                <a:spcPts val="600"/>
+              </a:spcAft>
+            </a:pPr>
+            <a:r>
+              <a:rPr sz="1500">
+                <a:solidFill>
+                  <a:srgbClr val="22282E"/>
+                </a:solidFill>
+              </a:rPr>
+              <a:t>•  Servidor de eco en Kali, para entender el lado servidor completo:</a:t>
+            </a:r>
+          </a:p>
+          <a:p>
+            <a:pPr>
+              <a:spcAft>
+                <a:spcPts val="600"/>
+              </a:spcAft>
+            </a:pPr>
+            <a:r>
+              <a:rPr sz="1500">
+                <a:solidFill>
+                  <a:srgbClr val="22282E"/>
+                </a:solidFill>
+              </a:rPr>
+              <a:t>•  Pruébalo desde otra terminal con nc 10.10.10.5 9000 y escribe algo: debería devolvértelo.</a:t>
+            </a:r>
+          </a:p>
+          <a:p>
+            <a:pPr>
+              <a:spcAft>
+                <a:spcPts val="600"/>
+              </a:spcAft>
+            </a:pPr>
+            <a:r>
+              <a:rPr sz="1500">
+                <a:solidFill>
+                  <a:srgbClr val="22282E"/>
+                </a:solidFill>
+              </a:rPr>
+              <a:t>•  UDP sin conexión. Envía un datagrama con SOCKDGRAM y observa que no hay handshake ni garantía de entrega:</a:t>
+            </a:r>
+          </a:p>
+          <a:p>
+            <a:pPr>
+              <a:spcAft>
+                <a:spcPts val="600"/>
+              </a:spcAft>
+            </a:pPr>
+            <a:r>
+              <a:rPr sz="1500">
+                <a:solidFill>
+                  <a:srgbClr val="22282E"/>
+                </a:solidFill>
+              </a:rPr>
+              <a:t>•  Escáner de puertos secuencial. Recorre un rango con connectex() (devuelve 0 si abre):</a:t>
+            </a:r>
+          </a:p>
+          <a:p>
+            <a:pPr>
+              <a:spcAft>
+                <a:spcPts val="600"/>
+              </a:spcAft>
+            </a:pPr>
+            <a:r>
+              <a:rPr sz="1500">
+                <a:solidFill>
+                  <a:srgbClr val="22282E"/>
+                </a:solidFill>
+              </a:rPr>
+              <a:t>•  Banner grabbing. Para cada puerto abierto, intenta leer el banner y guárdalo; para servicios web, envía primero b"HEAD / HTTP/1.0\r\n\r\n".</a:t>
+            </a:r>
+          </a:p>
+          <a:p>
+            <a:pPr>
+              <a:spcAft>
+                <a:spcPts val="600"/>
+              </a:spcAft>
+            </a:pPr>
+            <a:r>
+              <a:rPr sz="1500">
+                <a:solidFill>
+                  <a:srgbClr val="22282E"/>
+                </a:solidFill>
+              </a:rPr>
+              <a:t>•  Acelerar con hilos. Reescribe el escáner con concurrent.futures.ThreadPoolExecutor y mide el tiempo con time.perfcounter() para comparar con la versión secuencial.</a:t>
             </a:r>
           </a:p>
         </p:txBody>
